--- a/reports/02-kpi-dashboard.pptx
+++ b/reports/02-kpi-dashboard.pptx
@@ -107,7 +107,7 @@
   <p:extLst>
     <p:ext uri="{521415D9-36F7-43E2-AB2F-B90AF26B5E84}">
       <p14:sectionLst xmlns:p14="http://schemas.microsoft.com/office/powerpoint/2010/main">
-        <p14:section name="KPI dashboard" id="{9b1b7ded-c2ea-1f0a-c627-e9ffd15919b8}">
+        <p14:section name="KPI dashboard" id="{e6652bd1-371c-7664-36b1-1c189ea6348c}">
           <p14:sldIdLst>
             <p14:sldId id="256"/>
           </p14:sldIdLst>
